--- a/data-eng/decks/w4d3s0.pptx
+++ b/data-eng/decks/w4d3s0.pptx
@@ -5592,7 +5592,7 @@
                 <a:ea typeface="Pretendard"/>
                 <a:cs typeface="Pretendard"/>
               </a:rPr>
-              <a:t>1 4-2 끝 상태</a:t>
+              <a:t>1. 4-2 끝 상태</a:t>
             </a:r>
           </a:p>
         </p:txBody>
@@ -5756,7 +5756,7 @@
                 <a:ea typeface="Pretendard"/>
                 <a:cs typeface="Pretendard"/>
               </a:rPr>
-              <a:t>2 부품 받기</a:t>
+              <a:t>2. 부품 받기</a:t>
             </a:r>
           </a:p>
         </p:txBody>
@@ -5920,7 +5920,7 @@
                 <a:ea typeface="Pretendard"/>
                 <a:cs typeface="Pretendard"/>
               </a:rPr>
-              <a:t>3 오늘 만들 것</a:t>
+              <a:t>3. 오늘 만들 것</a:t>
             </a:r>
           </a:p>
         </p:txBody>
@@ -6084,7 +6084,7 @@
                 <a:ea typeface="Pretendard"/>
                 <a:cs typeface="Pretendard"/>
               </a:rPr>
-              <a:t>4 환경 재설정</a:t>
+              <a:t>4. 환경 재설정</a:t>
             </a:r>
           </a:p>
         </p:txBody>
